--- a/documents/Design-and-Development-of-a-Behavioural-Academic-Integrity-Checker.pptx
+++ b/documents/Design-and-Development-of-a-Behavioural-Academic-Integrity-Checker.pptx
@@ -6640,8 +6640,39 @@
               </a:rPr>
               <a:t>Generates explainable priority indicators</a:t>
             </a:r>
+          </a:p>
+          <a:p>
+            <a:pPr marL="342900" indent="-342900">
+              <a:lnSpc>
+                <a:spcPts val="2850"/>
+              </a:lnSpc>
+              <a:buSzPct val="100000"/>
+              <a:buFontTx/>
+              <a:buChar char="•"/>
+            </a:pPr>
+            <a:r>
+              <a:rPr lang="en-US" sz="1750" dirty="0">
+                <a:solidFill>
+                  <a:srgbClr val="504C49"/>
+                </a:solidFill>
+                <a:latin typeface="Source Serif 4" pitchFamily="34" charset="0"/>
+                <a:ea typeface="Source Serif 4" pitchFamily="34" charset="-122"/>
+                <a:cs typeface="Source Serif 4" pitchFamily="34" charset="-120"/>
+              </a:rPr>
+              <a:t>Detect AI-generated text</a:t>
+            </a:r>
             <a:endParaRPr lang="en-US" sz="1750" dirty="0"/>
           </a:p>
+          <a:p>
+            <a:pPr marL="342900" indent="-342900" algn="l">
+              <a:lnSpc>
+                <a:spcPts val="2850"/>
+              </a:lnSpc>
+              <a:buSzPct val="100000"/>
+              <a:buChar char="•"/>
+            </a:pPr>
+            <a:endParaRPr lang="en-US" sz="1750" dirty="0"/>
+          </a:p>
         </p:txBody>
       </p:sp>
       <p:sp>
@@ -6652,7 +6683,7 @@
         </p:nvSpPr>
         <p:spPr>
           <a:xfrm>
-            <a:off x="793790" y="4809618"/>
+            <a:off x="793790" y="5554455"/>
             <a:ext cx="4511278" cy="354330"/>
           </a:xfrm>
           <a:prstGeom prst="rect">
@@ -6694,7 +6725,7 @@
         </p:nvSpPr>
         <p:spPr>
           <a:xfrm>
-            <a:off x="793790" y="5390762"/>
+            <a:off x="786289" y="6152387"/>
             <a:ext cx="8284131" cy="1088774"/>
           </a:xfrm>
           <a:prstGeom prst="rect">
@@ -6724,27 +6755,6 @@
                 <a:cs typeface="Source Serif 4" pitchFamily="34" charset="-120"/>
               </a:rPr>
               <a:t>Evaluate content quality</a:t>
-            </a:r>
-            <a:endParaRPr lang="en-US" sz="1750" dirty="0"/>
-          </a:p>
-          <a:p>
-            <a:pPr marL="342900" indent="-342900" algn="l">
-              <a:lnSpc>
-                <a:spcPts val="2850"/>
-              </a:lnSpc>
-              <a:buSzPct val="100000"/>
-              <a:buChar char="•"/>
-            </a:pPr>
-            <a:r>
-              <a:rPr lang="en-US" sz="1750" dirty="0">
-                <a:solidFill>
-                  <a:srgbClr val="504C49"/>
-                </a:solidFill>
-                <a:latin typeface="Source Serif 4" pitchFamily="34" charset="0"/>
-                <a:ea typeface="Source Serif 4" pitchFamily="34" charset="-122"/>
-                <a:cs typeface="Source Serif 4" pitchFamily="34" charset="-120"/>
-              </a:rPr>
-              <a:t>Detect AI-generated text</a:t>
             </a:r>
             <a:endParaRPr lang="en-US" sz="1750" dirty="0"/>
           </a:p>
@@ -10486,7 +10496,7 @@
         </p:blipFill>
         <p:spPr>
           <a:xfrm>
-            <a:off x="0" y="0"/>
+            <a:off x="0" y="251871"/>
             <a:ext cx="14630400" cy="8229600"/>
           </a:xfrm>
           <a:prstGeom prst="rect">
